--- a/Zadania domowe/Jakub_Wojciechowski_49872_homework_2_1.pptx
+++ b/Zadania domowe/Jakub_Wojciechowski_49872_homework_2_1.pptx
@@ -128,19 +128,19 @@
 <pc:chgInfo xmlns:a="http://schemas.openxmlformats.org/drawingml/2006/main" xmlns:r="http://schemas.openxmlformats.org/officeDocument/2006/relationships" xmlns:ac="http://schemas.microsoft.com/office/drawing/2013/main/command" xmlns:pc="http://schemas.microsoft.com/office/powerpoint/2013/main/command">
   <pc:docChgLst>
     <pc:chgData name="Jakub Wojciechowski" userId="ee59becc-10bc-4bea-a8c2-abcd21dbb78b" providerId="ADAL" clId="{6E28A7B6-A803-5EC2-8BCD-1276546AE81E}"/>
-    <pc:docChg chg="modSld delSection">
-      <pc:chgData name="Jakub Wojciechowski" userId="ee59becc-10bc-4bea-a8c2-abcd21dbb78b" providerId="ADAL" clId="{6E28A7B6-A803-5EC2-8BCD-1276546AE81E}" dt="2026-10-07T21:05:48.142" v="12" actId="17853"/>
+    <pc:docChg chg="undo custSel modSld delSection">
+      <pc:chgData name="Jakub Wojciechowski" userId="ee59becc-10bc-4bea-a8c2-abcd21dbb78b" providerId="ADAL" clId="{6E28A7B6-A803-5EC2-8BCD-1276546AE81E}" dt="2026-10-07T23:17:49.519" v="25" actId="20577"/>
       <pc:docMkLst>
         <pc:docMk/>
       </pc:docMkLst>
       <pc:sldChg chg="modSp mod">
-        <pc:chgData name="Jakub Wojciechowski" userId="ee59becc-10bc-4bea-a8c2-abcd21dbb78b" providerId="ADAL" clId="{6E28A7B6-A803-5EC2-8BCD-1276546AE81E}" dt="2026-10-07T21:02:23.330" v="11" actId="20577"/>
+        <pc:chgData name="Jakub Wojciechowski" userId="ee59becc-10bc-4bea-a8c2-abcd21dbb78b" providerId="ADAL" clId="{6E28A7B6-A803-5EC2-8BCD-1276546AE81E}" dt="2026-10-07T23:17:49.519" v="25" actId="20577"/>
         <pc:sldMkLst>
           <pc:docMk/>
           <pc:sldMk cId="0" sldId="256"/>
         </pc:sldMkLst>
         <pc:spChg chg="mod">
-          <ac:chgData name="Jakub Wojciechowski" userId="ee59becc-10bc-4bea-a8c2-abcd21dbb78b" providerId="ADAL" clId="{6E28A7B6-A803-5EC2-8BCD-1276546AE81E}" dt="2026-10-07T21:02:23.330" v="11" actId="20577"/>
+          <ac:chgData name="Jakub Wojciechowski" userId="ee59becc-10bc-4bea-a8c2-abcd21dbb78b" providerId="ADAL" clId="{6E28A7B6-A803-5EC2-8BCD-1276546AE81E}" dt="2026-10-07T23:17:49.519" v="25" actId="20577"/>
           <ac:spMkLst>
             <pc:docMk/>
             <pc:sldMk cId="0" sldId="256"/>
@@ -2914,7 +2914,7 @@
           </a:prstGeom>
           <a:extLst>
             <a:ext uri="{C572A759-6A51-4108-AA02-DFA0A04FC94B}">
-              <ma14:wrappingTextBoxFlag xmlns="" xmlns:ma14="http://schemas.microsoft.com/office/mac/drawingml/2011/main" val="0"/>
+              <ma14:wrappingTextBoxFlag xmlns:ma14="http://schemas.microsoft.com/office/mac/drawingml/2011/main" xmlns="" val="0"/>
             </a:ext>
           </a:extLst>
         </p:spPr>
@@ -2989,7 +2989,7 @@
           </a:prstGeom>
           <a:extLst>
             <a:ext uri="{C572A759-6A51-4108-AA02-DFA0A04FC94B}">
-              <ma14:wrappingTextBoxFlag xmlns="" xmlns:ma14="http://schemas.microsoft.com/office/mac/drawingml/2011/main" val="0"/>
+              <ma14:wrappingTextBoxFlag xmlns:ma14="http://schemas.microsoft.com/office/mac/drawingml/2011/main" xmlns="" val="0"/>
             </a:ext>
           </a:extLst>
         </p:spPr>
@@ -3365,36 +3365,40 @@
               <a:buNone/>
             </a:pPr>
             <a:r>
+              <a:rPr lang="en-US" sz="1800" dirty="0">
+                <a:solidFill>
+                  <a:schemeClr val="bg2"/>
+                </a:solidFill>
+              </a:rPr>
+              <a:t>Homework 2</a:t>
+            </a:r>
+            <a:r>
+              <a:rPr lang="en-US" dirty="0"/>
+              <a:t>.1</a:t>
+            </a:r>
+            <a:r>
+              <a:rPr lang="en-US" sz="1800" dirty="0">
+                <a:solidFill>
+                  <a:schemeClr val="bg2"/>
+                </a:solidFill>
+              </a:rPr>
+              <a:t>  ·  </a:t>
+            </a:r>
+            <a:r>
               <a:rPr lang="en-US" sz="1800">
                 <a:solidFill>
                   <a:schemeClr val="bg2"/>
                 </a:solidFill>
               </a:rPr>
-              <a:t>Homework 2</a:t>
-            </a:r>
-            <a:r>
-              <a:rPr lang="en-US"/>
-              <a:t>.</a:t>
-            </a:r>
-            <a:r>
-              <a:rPr lang="en-US" dirty="0"/>
-              <a:t>1</a:t>
-            </a:r>
-            <a:r>
-              <a:rPr lang="en-US" sz="1800">
+              <a:t>Jakub Wojciechowski 49872  </a:t>
+            </a:r>
+            <a:r>
+              <a:rPr lang="en-US" sz="1800" dirty="0">
                 <a:solidFill>
                   <a:schemeClr val="bg2"/>
                 </a:solidFill>
               </a:rPr>
-              <a:t>  </a:t>
-            </a:r>
-            <a:r>
-              <a:rPr lang="en-US" sz="1800" dirty="0">
-                <a:solidFill>
-                  <a:schemeClr val="bg2"/>
-                </a:solidFill>
-              </a:rPr>
-              <a:t>·  Jakub Wojciechowski  ·  Kozminski University</a:t>
+              <a:t>·  Kozminski University</a:t>
             </a:r>
             <a:endParaRPr lang="en-US" sz="1800" dirty="0"/>
           </a:p>
@@ -3631,7 +3635,7 @@
           </a:prstGeom>
           <a:extLst>
             <a:ext uri="{C572A759-6A51-4108-AA02-DFA0A04FC94B}">
-              <ma14:wrappingTextBoxFlag xmlns="" xmlns:ma14="http://schemas.microsoft.com/office/mac/drawingml/2011/main" val="0"/>
+              <ma14:wrappingTextBoxFlag xmlns:ma14="http://schemas.microsoft.com/office/mac/drawingml/2011/main" xmlns="" val="0"/>
             </a:ext>
           </a:extLst>
         </p:spPr>
@@ -3887,7 +3891,7 @@
           </a:prstGeom>
           <a:extLst>
             <a:ext uri="{C572A759-6A51-4108-AA02-DFA0A04FC94B}">
-              <ma14:wrappingTextBoxFlag xmlns="" xmlns:ma14="http://schemas.microsoft.com/office/mac/drawingml/2011/main" val="0"/>
+              <ma14:wrappingTextBoxFlag xmlns:ma14="http://schemas.microsoft.com/office/mac/drawingml/2011/main" xmlns="" val="0"/>
             </a:ext>
           </a:extLst>
         </p:spPr>
@@ -4290,7 +4294,7 @@
           </a:prstGeom>
           <a:extLst>
             <a:ext uri="{C572A759-6A51-4108-AA02-DFA0A04FC94B}">
-              <ma14:wrappingTextBoxFlag xmlns="" xmlns:ma14="http://schemas.microsoft.com/office/mac/drawingml/2011/main" val="0"/>
+              <ma14:wrappingTextBoxFlag xmlns:ma14="http://schemas.microsoft.com/office/mac/drawingml/2011/main" xmlns="" val="0"/>
             </a:ext>
           </a:extLst>
         </p:spPr>
@@ -4947,7 +4951,7 @@
           </a:prstGeom>
           <a:extLst>
             <a:ext uri="{C572A759-6A51-4108-AA02-DFA0A04FC94B}">
-              <ma14:wrappingTextBoxFlag xmlns="" xmlns:ma14="http://schemas.microsoft.com/office/mac/drawingml/2011/main" val="0"/>
+              <ma14:wrappingTextBoxFlag xmlns:ma14="http://schemas.microsoft.com/office/mac/drawingml/2011/main" xmlns="" val="0"/>
             </a:ext>
           </a:extLst>
         </p:spPr>
@@ -5600,7 +5604,7 @@
           </a:prstGeom>
           <a:extLst>
             <a:ext uri="{C572A759-6A51-4108-AA02-DFA0A04FC94B}">
-              <ma14:wrappingTextBoxFlag xmlns="" xmlns:ma14="http://schemas.microsoft.com/office/mac/drawingml/2011/main" val="0"/>
+              <ma14:wrappingTextBoxFlag xmlns:ma14="http://schemas.microsoft.com/office/mac/drawingml/2011/main" xmlns="" val="0"/>
             </a:ext>
           </a:extLst>
         </p:spPr>
@@ -6239,7 +6243,7 @@
           </a:prstGeom>
           <a:extLst>
             <a:ext uri="{C572A759-6A51-4108-AA02-DFA0A04FC94B}">
-              <ma14:wrappingTextBoxFlag xmlns="" xmlns:ma14="http://schemas.microsoft.com/office/mac/drawingml/2011/main" val="0"/>
+              <ma14:wrappingTextBoxFlag xmlns:ma14="http://schemas.microsoft.com/office/mac/drawingml/2011/main" xmlns="" val="0"/>
             </a:ext>
           </a:extLst>
         </p:spPr>
@@ -6748,7 +6752,7 @@
           </a:prstGeom>
           <a:extLst>
             <a:ext uri="{C572A759-6A51-4108-AA02-DFA0A04FC94B}">
-              <ma14:wrappingTextBoxFlag xmlns="" xmlns:ma14="http://schemas.microsoft.com/office/mac/drawingml/2011/main" val="0"/>
+              <ma14:wrappingTextBoxFlag xmlns:ma14="http://schemas.microsoft.com/office/mac/drawingml/2011/main" xmlns="" val="0"/>
             </a:ext>
           </a:extLst>
         </p:spPr>
@@ -7224,7 +7228,7 @@
           </a:prstGeom>
           <a:extLst>
             <a:ext uri="{C572A759-6A51-4108-AA02-DFA0A04FC94B}">
-              <ma14:wrappingTextBoxFlag xmlns="" xmlns:ma14="http://schemas.microsoft.com/office/mac/drawingml/2011/main" val="0"/>
+              <ma14:wrappingTextBoxFlag xmlns:ma14="http://schemas.microsoft.com/office/mac/drawingml/2011/main" xmlns="" val="0"/>
             </a:ext>
           </a:extLst>
         </p:spPr>
@@ -8562,7 +8566,7 @@
           </a:prstGeom>
           <a:extLst>
             <a:ext uri="{C572A759-6A51-4108-AA02-DFA0A04FC94B}">
-              <ma14:wrappingTextBoxFlag xmlns="" xmlns:ma14="http://schemas.microsoft.com/office/mac/drawingml/2011/main" val="0"/>
+              <ma14:wrappingTextBoxFlag xmlns:ma14="http://schemas.microsoft.com/office/mac/drawingml/2011/main" xmlns="" val="0"/>
             </a:ext>
           </a:extLst>
         </p:spPr>
@@ -9447,7 +9451,7 @@
           </a:prstGeom>
           <a:extLst>
             <a:ext uri="{C572A759-6A51-4108-AA02-DFA0A04FC94B}">
-              <ma14:wrappingTextBoxFlag xmlns="" xmlns:ma14="http://schemas.microsoft.com/office/mac/drawingml/2011/main" val="0"/>
+              <ma14:wrappingTextBoxFlag xmlns:ma14="http://schemas.microsoft.com/office/mac/drawingml/2011/main" xmlns="" val="0"/>
             </a:ext>
           </a:extLst>
         </p:spPr>
@@ -9703,7 +9707,7 @@
           </a:prstGeom>
           <a:extLst>
             <a:ext uri="{C572A759-6A51-4108-AA02-DFA0A04FC94B}">
-              <ma14:wrappingTextBoxFlag xmlns="" xmlns:ma14="http://schemas.microsoft.com/office/mac/drawingml/2011/main" val="0"/>
+              <ma14:wrappingTextBoxFlag xmlns:ma14="http://schemas.microsoft.com/office/mac/drawingml/2011/main" xmlns="" val="0"/>
             </a:ext>
           </a:extLst>
         </p:spPr>
